--- a/docs/ppt/부록_x01_model.pptx
+++ b/docs/ppt/부록_x01_model.pptx
@@ -1015,7 +1015,7 @@
                 <a:ea typeface="Malgun Gothic" pitchFamily="34" charset="-122"/>
                 <a:cs typeface="Malgun Gothic" pitchFamily="34" charset="-120"/>
               </a:rPr>
-              <a:t>회귀 모델이 하는 일</a:t>
+              <a:t>우리가 쓰는 회귀 모델</a:t>
             </a:r>
             <a:endParaRPr lang="en-US" sz="2475" dirty="0"/>
           </a:p>
@@ -1057,7 +1057,7 @@
                 <a:ea typeface="Malgun Gothic" pitchFamily="34" charset="-122"/>
                 <a:cs typeface="Malgun Gothic" pitchFamily="34" charset="-120"/>
               </a:rPr>
-              <a:t>시험 결과 점들을 지나는 곡선을 찾는 일입니다. 그 곡선을 어떻게 긋느냐가 방법의 차이입니다.</a:t>
+              <a:t>모델은 시험 결과 점 사이로 곡선을 하나 긋습니다. 곡선을 긋는 방법이 모델마다 다릅니다.</a:t>
             </a:r>
             <a:endParaRPr lang="en-US" sz="1275" dirty="0"/>
           </a:p>
@@ -1202,8 +1202,8 @@
         </p:nvSpPr>
         <p:spPr>
           <a:xfrm>
-            <a:off x="9048750" y="1790700"/>
-            <a:ext cx="2343150" cy="125730"/>
+            <a:off x="8753475" y="1790700"/>
+            <a:ext cx="2638425" cy="125730"/>
           </a:xfrm>
           <a:prstGeom prst="rect">
             <a:avLst/>
@@ -1230,7 +1230,7 @@
                 <a:ea typeface="Malgun Gothic" pitchFamily="34" charset="-122"/>
                 <a:cs typeface="Malgun Gothic" pitchFamily="34" charset="-120"/>
               </a:rPr>
-              <a:t>우리가 쓰는 방법 · 점 40개는 실제 시험</a:t>
+              <a:t>우리가 쓰는 방법 · 점 40개는 실제 시험 결과</a:t>
             </a:r>
             <a:endParaRPr lang="en-US" sz="825" dirty="0"/>
           </a:p>
@@ -5179,7 +5179,7 @@
                 <a:ea typeface="Malgun Gothic" pitchFamily="34" charset="-122"/>
                 <a:cs typeface="Malgun Gothic" pitchFamily="34" charset="-120"/>
               </a:rPr>
-              <a:t>가로 외기온도 ℃ · 세로 더하는 값 MW · 빨간 선이 도구가 쓰는 곡선</a:t>
+              <a:t>가로 외기온도(℃) · 세로 더하는 값(MW) · 빨간 선이 도구가 쓰는 곡선</a:t>
             </a:r>
             <a:endParaRPr lang="en-US" sz="750" dirty="0"/>
           </a:p>
@@ -5241,7 +5241,7 @@
                 <a:ea typeface="Malgun Gothic" pitchFamily="34" charset="-122"/>
                 <a:cs typeface="Malgun Gothic" pitchFamily="34" charset="-120"/>
               </a:rPr>
-              <a:t>곡선을 하나만 고르지 않습니다</a:t>
+              <a:t>GP 는 곡선을 하나만 고르지 않습니다</a:t>
             </a:r>
             <a:endParaRPr lang="en-US" sz="1050" dirty="0"/>
           </a:p>
@@ -5283,7 +5283,7 @@
                 <a:ea typeface="Malgun Gothic" pitchFamily="34" charset="-122"/>
                 <a:cs typeface="Malgun Gothic" pitchFamily="34" charset="-120"/>
               </a:rPr>
-              <a:t>점들을 지날 수 있는 곡선을 모두 놓고, 그 한가운데를 답으로 냅니다.</a:t>
+              <a:t>점을 지나는 곡선은 여러 개 있습니다. GP 는 그 곡선들의 가운데를 답으로 냅니다.</a:t>
             </a:r>
             <a:endParaRPr lang="en-US" sz="825" dirty="0"/>
           </a:p>
@@ -5345,7 +5345,7 @@
                 <a:ea typeface="Malgun Gothic" pitchFamily="34" charset="-122"/>
                 <a:cs typeface="Malgun Gothic" pitchFamily="34" charset="-120"/>
               </a:rPr>
-              <a:t>그래서 범위가 같이 나옵니다</a:t>
+              <a:t>값과 함께 범위도 나옵니다</a:t>
             </a:r>
             <a:endParaRPr lang="en-US" sz="1050" dirty="0"/>
           </a:p>
@@ -5387,7 +5387,7 @@
                 <a:ea typeface="Malgun Gothic" pitchFamily="34" charset="-122"/>
                 <a:cs typeface="Malgun Gothic" pitchFamily="34" charset="-120"/>
               </a:rPr>
-              <a:t>연한 점선 두 줄이 90% 범위입니다. 값 하나만 내놓는 방법에는 없는 것입니다.</a:t>
+              <a:t>점선 두 줄 사이가 90% 범위입니다. 다른 방법은 값만 주고 범위는 주지 않습니다.</a:t>
             </a:r>
             <a:endParaRPr lang="en-US" sz="825" dirty="0"/>
           </a:p>
@@ -5449,7 +5449,7 @@
                 <a:ea typeface="Malgun Gothic" pitchFamily="34" charset="-122"/>
                 <a:cs typeface="Malgun Gothic" pitchFamily="34" charset="-120"/>
               </a:rPr>
-              <a:t>커널은 곡선의 성격입니다</a:t>
+              <a:t>커널이 곡선 모양을 정합니다</a:t>
             </a:r>
             <a:endParaRPr lang="en-US" sz="1050" dirty="0"/>
           </a:p>
@@ -5491,7 +5491,7 @@
                 <a:ea typeface="Malgun Gothic" pitchFamily="34" charset="-122"/>
                 <a:cs typeface="Malgun Gothic" pitchFamily="34" charset="-120"/>
               </a:rPr>
-              <a:t>얼마나 부드럽게 그을지 정하는 설정입니다. 아래 셋이 그 차이입니다.</a:t>
+              <a:t>곡선을 얼마나 부드럽게 그을지 정하는 설정입니다. 아래에서 셋을 비교했습니다.</a:t>
             </a:r>
             <a:endParaRPr lang="en-US" sz="825" dirty="0"/>
           </a:p>
@@ -5531,7 +5531,7 @@
         <p:spPr>
           <a:xfrm>
             <a:off x="685800" y="3790950"/>
-            <a:ext cx="3686175" cy="247650"/>
+            <a:ext cx="1743075" cy="247650"/>
           </a:xfrm>
           <a:prstGeom prst="rect">
             <a:avLst>
@@ -5595,7 +5595,7 @@
         <p:spPr>
           <a:xfrm>
             <a:off x="1009650" y="3848100"/>
-            <a:ext cx="3248025" cy="154305"/>
+            <a:ext cx="1304925" cy="154305"/>
           </a:xfrm>
           <a:prstGeom prst="rect">
             <a:avLst/>
@@ -5622,7 +5622,7 @@
                 <a:ea typeface="Malgun Gothic" pitchFamily="34" charset="-122"/>
                 <a:cs typeface="Malgun Gothic" pitchFamily="34" charset="-120"/>
               </a:rPr>
-              <a:t>긋는 방법 셋 · 곡선의 성격이 이렇게 다릅니다</a:t>
+              <a:t>커널 세 가지 비교</a:t>
             </a:r>
             <a:endParaRPr lang="en-US" sz="1013" dirty="0"/>
           </a:p>
@@ -5706,7 +5706,7 @@
                 <a:ea typeface="Malgun Gothic" pitchFamily="34" charset="-122"/>
                 <a:cs typeface="Malgun Gothic" pitchFamily="34" charset="-120"/>
               </a:rPr>
-              <a:t>GP · RBF (제곱지수)</a:t>
+              <a:t>GP · RBF</a:t>
             </a:r>
             <a:endParaRPr lang="en-US" sz="1050" dirty="0"/>
           </a:p>
@@ -6819,7 +6819,7 @@
                 <a:ea typeface="Malgun Gothic" pitchFamily="34" charset="-122"/>
                 <a:cs typeface="Malgun Gothic" pitchFamily="34" charset="-120"/>
               </a:rPr>
-              <a:t>가까운 온도끼리는 아주 비슷하다고 봅니다. 그래서 가장 매끄럽게 이어집니다.</a:t>
+              <a:t>RBF 는 옆 온도와 비슷하게 이어 줍니다. 그래서 곡선이 가장 부드럽습니다.</a:t>
             </a:r>
             <a:endParaRPr lang="en-US" sz="788" dirty="0"/>
           </a:p>
@@ -6903,7 +6903,7 @@
                 <a:ea typeface="Malgun Gothic" pitchFamily="34" charset="-122"/>
                 <a:cs typeface="Malgun Gothic" pitchFamily="34" charset="-120"/>
               </a:rPr>
-              <a:t>시험이 없는 온도도 자연스럽게 메웁니다</a:t>
+              <a:t>시험이 없는 온도도 채워 줍니다</a:t>
             </a:r>
             <a:endParaRPr lang="en-US" sz="788" dirty="0"/>
           </a:p>
@@ -6987,7 +6987,7 @@
                 <a:ea typeface="Malgun Gothic" pitchFamily="34" charset="-122"/>
                 <a:cs typeface="Malgun Gothic" pitchFamily="34" charset="-120"/>
               </a:rPr>
-              <a:t>갑작스러운 꺾임은 따라가지 못합니다</a:t>
+              <a:t>갑자기 꺾이는 곳은 놓칩니다</a:t>
             </a:r>
             <a:endParaRPr lang="en-US" sz="788" dirty="0"/>
           </a:p>
@@ -7052,7 +7052,7 @@
                 <a:ea typeface="Malgun Gothic" pitchFamily="34" charset="-122"/>
                 <a:cs typeface="Malgun Gothic" pitchFamily="34" charset="-120"/>
               </a:rPr>
-              <a:t>GP · 지수 (Matérn 1/2)</a:t>
+              <a:t>GP · 지수</a:t>
             </a:r>
             <a:endParaRPr lang="en-US" sz="1050" dirty="0"/>
           </a:p>
@@ -8123,7 +8123,7 @@
                 <a:ea typeface="Malgun Gothic" pitchFamily="34" charset="-122"/>
                 <a:cs typeface="Malgun Gothic" pitchFamily="34" charset="-120"/>
               </a:rPr>
-              <a:t>바로 옆 점만 보고 따라갑니다. 그래서 각지고 구불거립니다.</a:t>
+              <a:t>지수는 바로 옆 점만 보고 따라갑니다. 그래서 곡선이 구불거립니다.</a:t>
             </a:r>
             <a:endParaRPr lang="en-US" sz="788" dirty="0"/>
           </a:p>
@@ -8207,7 +8207,7 @@
                 <a:ea typeface="Malgun Gothic" pitchFamily="34" charset="-122"/>
                 <a:cs typeface="Malgun Gothic" pitchFamily="34" charset="-120"/>
               </a:rPr>
-              <a:t>급한 변화도 놓치지 않습니다</a:t>
+              <a:t>갑자기 꺾이는 곳도 잡습니다</a:t>
             </a:r>
             <a:endParaRPr lang="en-US" sz="788" dirty="0"/>
           </a:p>
@@ -8291,7 +8291,7 @@
                 <a:ea typeface="Malgun Gothic" pitchFamily="34" charset="-122"/>
                 <a:cs typeface="Malgun Gothic" pitchFamily="34" charset="-120"/>
               </a:rPr>
-              <a:t>잡음까지 따라가 1.8배 더 구불거립니다</a:t>
+              <a:t>흔들림까지 따라가 RBF 보다 1.8배 구불거립니다</a:t>
             </a:r>
             <a:endParaRPr lang="en-US" sz="788" dirty="0"/>
           </a:p>
@@ -8398,7 +8398,7 @@
                 <a:ea typeface="Malgun Gothic" pitchFamily="34" charset="-122"/>
                 <a:cs typeface="Malgun Gothic" pitchFamily="34" charset="-120"/>
               </a:rPr>
-              <a:t>GP 가 아닌 것</a:t>
+              <a:t>GP 가 아닌 방법</a:t>
             </a:r>
             <a:endParaRPr lang="en-US" sz="750" dirty="0"/>
           </a:p>
@@ -9469,7 +9469,7 @@
                 <a:ea typeface="Malgun Gothic" pitchFamily="34" charset="-122"/>
                 <a:cs typeface="Malgun Gothic" pitchFamily="34" charset="-120"/>
               </a:rPr>
-              <a:t>그 온도 가까이에 있는 시험들의 평균입니다. 가까울수록 무게를 더 줍니다.</a:t>
+              <a:t>커널회귀는 가까운 온도의 시험값을 평균 냅니다. 가까운 값을 더 크게 봅니다.</a:t>
             </a:r>
             <a:endParaRPr lang="en-US" sz="788" dirty="0"/>
           </a:p>
@@ -9553,7 +9553,7 @@
                 <a:ea typeface="Malgun Gothic" pitchFamily="34" charset="-122"/>
                 <a:cs typeface="Malgun Gothic" pitchFamily="34" charset="-120"/>
               </a:rPr>
-              <a:t>셈이 단순하고 뜻이 바로 보입니다</a:t>
+              <a:t>계산이 단순해서 이해하기 쉽습니다</a:t>
             </a:r>
             <a:endParaRPr lang="en-US" sz="788" dirty="0"/>
           </a:p>
@@ -9766,7 +9766,7 @@
                 <a:ea typeface="Malgun Gothic" pitchFamily="34" charset="-122"/>
                 <a:cs typeface="Malgun Gothic" pitchFamily="34" charset="-120"/>
               </a:rPr>
-              <a:t>우리 실적에서는 세 곡선이 크게 다르지 않았습니다. 그래서 눈이 아니라 성적으로 골랐습니다.</a:t>
+              <a:t>세 곡선은 눈으로 봐서 고를 만큼 다르지 않았습니다. 그래서 성적으로 골랐습니다.</a:t>
             </a:r>
             <a:endParaRPr lang="en-US" sz="1163" dirty="0"/>
           </a:p>
